--- a/3DLV3/Plam/仕様書.pptx
+++ b/3DLV3/Plam/仕様書.pptx
@@ -5,7 +5,7 @@
     <p:sldMasterId id="2147483889" r:id="rId1"/>
   </p:sldMasterIdLst>
   <p:notesMasterIdLst>
-    <p:notesMasterId r:id="rId9"/>
+    <p:notesMasterId r:id="rId10"/>
   </p:notesMasterIdLst>
   <p:sldIdLst>
     <p:sldId id="264" r:id="rId2"/>
@@ -14,7 +14,8 @@
     <p:sldId id="282" r:id="rId5"/>
     <p:sldId id="281" r:id="rId6"/>
     <p:sldId id="283" r:id="rId7"/>
-    <p:sldId id="278" r:id="rId8"/>
+    <p:sldId id="284" r:id="rId8"/>
+    <p:sldId id="278" r:id="rId9"/>
   </p:sldIdLst>
   <p:sldSz cx="12192000" cy="6858000"/>
   <p:notesSz cx="6858000" cy="9144000"/>
@@ -184,7 +185,7 @@
   <pc:docChgLst>
     <pc:chgData name="kousuke yamamoto" userId="516c4d66ab16f868" providerId="LiveId" clId="{D5857573-2C41-4D75-AB9F-5CA89102AE51}"/>
     <pc:docChg chg="undo custSel addSld delSld modSld sldOrd">
-      <pc:chgData name="kousuke yamamoto" userId="516c4d66ab16f868" providerId="LiveId" clId="{D5857573-2C41-4D75-AB9F-5CA89102AE51}" dt="2026-10-13T07:45:07.157" v="2505" actId="20577"/>
+      <pc:chgData name="kousuke yamamoto" userId="516c4d66ab16f868" providerId="LiveId" clId="{D5857573-2C41-4D75-AB9F-5CA89102AE51}" dt="2026-10-19T06:10:23.927" v="2722" actId="20577"/>
       <pc:docMkLst>
         <pc:docMk/>
       </pc:docMkLst>
@@ -1358,6 +1359,21 @@
           </ac:spMkLst>
         </pc:spChg>
       </pc:sldChg>
+      <pc:sldChg chg="addSp modSp new mod ord">
+        <pc:chgData name="kousuke yamamoto" userId="516c4d66ab16f868" providerId="LiveId" clId="{D5857573-2C41-4D75-AB9F-5CA89102AE51}" dt="2026-10-19T06:10:23.927" v="2722" actId="20577"/>
+        <pc:sldMkLst>
+          <pc:docMk/>
+          <pc:sldMk cId="595033509" sldId="284"/>
+        </pc:sldMkLst>
+        <pc:spChg chg="add mod">
+          <ac:chgData name="kousuke yamamoto" userId="516c4d66ab16f868" providerId="LiveId" clId="{D5857573-2C41-4D75-AB9F-5CA89102AE51}" dt="2026-10-19T06:10:23.927" v="2722" actId="20577"/>
+          <ac:spMkLst>
+            <pc:docMk/>
+            <pc:sldMk cId="595033509" sldId="284"/>
+            <ac:spMk id="2" creationId="{A1B96D17-6E0A-4C69-88E1-0B478ACC56E7}"/>
+          </ac:spMkLst>
+        </pc:spChg>
+      </pc:sldChg>
     </pc:docChg>
   </pc:docChgLst>
 </pc:chgInfo>
@@ -1445,7 +1461,7 @@
           <a:p>
             <a:fld id="{EA23BABC-04D1-40FF-A826-E108E600BEAD}" type="datetimeFigureOut">
               <a:rPr kumimoji="1" lang="ja-JP" altLang="en-US" smtClean="0"/>
-              <a:t>2026/10/13</a:t>
+              <a:t>2026/10/19</a:t>
             </a:fld>
             <a:endParaRPr kumimoji="1" lang="ja-JP" altLang="en-US"/>
           </a:p>
@@ -1975,7 +1991,7 @@
           <a:p>
             <a:fld id="{5BCAD085-E8A6-8845-BD4E-CB4CCA059FC4}" type="datetimeFigureOut">
               <a:rPr lang="en-US" smtClean="0"/>
-              <a:t>10/13/2026</a:t>
+              <a:t>10/19/2026</a:t>
             </a:fld>
             <a:endParaRPr lang="en-US"/>
           </a:p>
@@ -2205,7 +2221,7 @@
           <a:p>
             <a:fld id="{5BCAD085-E8A6-8845-BD4E-CB4CCA059FC4}" type="datetimeFigureOut">
               <a:rPr lang="en-US" smtClean="0"/>
-              <a:t>10/13/2026</a:t>
+              <a:t>10/19/2026</a:t>
             </a:fld>
             <a:endParaRPr lang="en-US"/>
           </a:p>
@@ -2445,7 +2461,7 @@
           <a:p>
             <a:fld id="{5BCAD085-E8A6-8845-BD4E-CB4CCA059FC4}" type="datetimeFigureOut">
               <a:rPr lang="en-US" smtClean="0"/>
-              <a:t>10/13/2026</a:t>
+              <a:t>10/19/2026</a:t>
             </a:fld>
             <a:endParaRPr lang="en-US"/>
           </a:p>
@@ -2675,7 +2691,7 @@
           <a:p>
             <a:fld id="{5BCAD085-E8A6-8845-BD4E-CB4CCA059FC4}" type="datetimeFigureOut">
               <a:rPr lang="en-US" smtClean="0"/>
-              <a:t>10/13/2026</a:t>
+              <a:t>10/19/2026</a:t>
             </a:fld>
             <a:endParaRPr lang="en-US"/>
           </a:p>
@@ -2950,7 +2966,7 @@
           <a:p>
             <a:fld id="{5BCAD085-E8A6-8845-BD4E-CB4CCA059FC4}" type="datetimeFigureOut">
               <a:rPr lang="en-US" smtClean="0"/>
-              <a:t>10/13/2026</a:t>
+              <a:t>10/19/2026</a:t>
             </a:fld>
             <a:endParaRPr lang="en-US"/>
           </a:p>
@@ -3279,7 +3295,7 @@
           <a:p>
             <a:fld id="{5BCAD085-E8A6-8845-BD4E-CB4CCA059FC4}" type="datetimeFigureOut">
               <a:rPr lang="en-US" smtClean="0"/>
-              <a:t>10/13/2026</a:t>
+              <a:t>10/19/2026</a:t>
             </a:fld>
             <a:endParaRPr lang="en-US"/>
           </a:p>
@@ -3755,7 +3771,7 @@
           <a:p>
             <a:fld id="{5BCAD085-E8A6-8845-BD4E-CB4CCA059FC4}" type="datetimeFigureOut">
               <a:rPr lang="en-US" smtClean="0"/>
-              <a:t>10/13/2026</a:t>
+              <a:t>10/19/2026</a:t>
             </a:fld>
             <a:endParaRPr lang="en-US"/>
           </a:p>
@@ -3896,7 +3912,7 @@
           <a:p>
             <a:fld id="{5BCAD085-E8A6-8845-BD4E-CB4CCA059FC4}" type="datetimeFigureOut">
               <a:rPr lang="en-US" smtClean="0"/>
-              <a:t>10/13/2026</a:t>
+              <a:t>10/19/2026</a:t>
             </a:fld>
             <a:endParaRPr lang="en-US"/>
           </a:p>
@@ -4009,7 +4025,7 @@
           <a:p>
             <a:fld id="{5BCAD085-E8A6-8845-BD4E-CB4CCA059FC4}" type="datetimeFigureOut">
               <a:rPr lang="en-US" smtClean="0"/>
-              <a:t>10/13/2026</a:t>
+              <a:t>10/19/2026</a:t>
             </a:fld>
             <a:endParaRPr lang="en-US"/>
           </a:p>
@@ -4352,7 +4368,7 @@
           <a:p>
             <a:fld id="{5BCAD085-E8A6-8845-BD4E-CB4CCA059FC4}" type="datetimeFigureOut">
               <a:rPr lang="en-US" smtClean="0"/>
-              <a:t>10/13/2026</a:t>
+              <a:t>10/19/2026</a:t>
             </a:fld>
             <a:endParaRPr lang="en-US"/>
           </a:p>
@@ -4640,7 +4656,7 @@
           <a:p>
             <a:fld id="{5BCAD085-E8A6-8845-BD4E-CB4CCA059FC4}" type="datetimeFigureOut">
               <a:rPr lang="en-US" smtClean="0"/>
-              <a:t>10/13/2026</a:t>
+              <a:t>10/19/2026</a:t>
             </a:fld>
             <a:endParaRPr lang="en-US"/>
           </a:p>
@@ -4916,7 +4932,7 @@
           <a:p>
             <a:fld id="{5BCAD085-E8A6-8845-BD4E-CB4CCA059FC4}" type="datetimeFigureOut">
               <a:rPr lang="en-US" smtClean="0"/>
-              <a:t>10/13/2026</a:t>
+              <a:t>10/19/2026</a:t>
             </a:fld>
             <a:endParaRPr lang="en-US"/>
           </a:p>
@@ -7761,6 +7777,149 @@
 </file>
 
 <file path=ppt/slides/slide7.xml><?xml version="1.0" encoding="utf-8"?>
+<p:sld xmlns:a="http://schemas.openxmlformats.org/drawingml/2006/main" xmlns:r="http://schemas.openxmlformats.org/officeDocument/2006/relationships" xmlns:p="http://schemas.openxmlformats.org/presentationml/2006/main">
+  <p:cSld>
+    <p:spTree>
+      <p:nvGrpSpPr>
+        <p:cNvPr id="1" name=""/>
+        <p:cNvGrpSpPr/>
+        <p:nvPr/>
+      </p:nvGrpSpPr>
+      <p:grpSpPr>
+        <a:xfrm>
+          <a:off x="0" y="0"/>
+          <a:ext cx="0" cy="0"/>
+          <a:chOff x="0" y="0"/>
+          <a:chExt cx="0" cy="0"/>
+        </a:xfrm>
+      </p:grpSpPr>
+      <p:sp>
+        <p:nvSpPr>
+          <p:cNvPr id="2" name="正方形/長方形 1">
+            <a:extLst>
+              <a:ext uri="{FF2B5EF4-FFF2-40B4-BE49-F238E27FC236}">
+                <a16:creationId xmlns:a16="http://schemas.microsoft.com/office/drawing/2014/main" id="{A1B96D17-6E0A-4C69-88E1-0B478ACC56E7}"/>
+              </a:ext>
+            </a:extLst>
+          </p:cNvPr>
+          <p:cNvSpPr/>
+          <p:nvPr/>
+        </p:nvSpPr>
+        <p:spPr>
+          <a:xfrm>
+            <a:off x="0" y="0"/>
+            <a:ext cx="12192000" cy="6858000"/>
+          </a:xfrm>
+          <a:prstGeom prst="rect">
+            <a:avLst/>
+          </a:prstGeom>
+        </p:spPr>
+        <p:style>
+          <a:lnRef idx="2">
+            <a:schemeClr val="accent1">
+              <a:shade val="50000"/>
+            </a:schemeClr>
+          </a:lnRef>
+          <a:fillRef idx="1">
+            <a:schemeClr val="accent1"/>
+          </a:fillRef>
+          <a:effectRef idx="0">
+            <a:schemeClr val="accent1"/>
+          </a:effectRef>
+          <a:fontRef idx="minor">
+            <a:schemeClr val="lt1"/>
+          </a:fontRef>
+        </p:style>
+        <p:txBody>
+          <a:bodyPr rtlCol="0" anchor="ctr"/>
+          <a:lstStyle/>
+          <a:p>
+            <a:pPr algn="ctr"/>
+            <a:r>
+              <a:rPr kumimoji="1" lang="ja-JP" altLang="en-US" dirty="0"/>
+              <a:t>ステージについて</a:t>
+            </a:r>
+            <a:endParaRPr kumimoji="1" lang="en-US" altLang="ja-JP" dirty="0"/>
+          </a:p>
+          <a:p>
+            <a:pPr algn="ctr"/>
+            <a:endParaRPr lang="en-US" altLang="ja-JP" dirty="0"/>
+          </a:p>
+          <a:p>
+            <a:pPr algn="ctr"/>
+            <a:r>
+              <a:rPr kumimoji="1" lang="ja-JP" altLang="en-US" dirty="0"/>
+              <a:t>５ステージ</a:t>
+            </a:r>
+            <a:endParaRPr kumimoji="1" lang="en-US" altLang="ja-JP" dirty="0"/>
+          </a:p>
+          <a:p>
+            <a:pPr algn="ctr"/>
+            <a:endParaRPr lang="en-US" altLang="ja-JP" dirty="0"/>
+          </a:p>
+          <a:p>
+            <a:pPr algn="ctr"/>
+            <a:r>
+              <a:rPr kumimoji="1" lang="ja-JP" altLang="en-US" dirty="0"/>
+              <a:t>１　雨粒６個１２個</a:t>
+            </a:r>
+            <a:endParaRPr kumimoji="1" lang="en-US" altLang="ja-JP" dirty="0"/>
+          </a:p>
+          <a:p>
+            <a:pPr algn="ctr"/>
+            <a:r>
+              <a:rPr lang="ja-JP" altLang="en-US"/>
+              <a:t>２　雨粒８個１６個　</a:t>
+            </a:r>
+            <a:endParaRPr lang="en-US" altLang="ja-JP" dirty="0"/>
+          </a:p>
+          <a:p>
+            <a:pPr algn="ctr"/>
+            <a:r>
+              <a:rPr kumimoji="1" lang="ja-JP" altLang="en-US" dirty="0"/>
+              <a:t>３　雨粒</a:t>
+            </a:r>
+            <a:endParaRPr kumimoji="1" lang="en-US" altLang="ja-JP" dirty="0"/>
+          </a:p>
+          <a:p>
+            <a:pPr algn="ctr"/>
+            <a:r>
+              <a:rPr lang="ja-JP" altLang="en-US" dirty="0"/>
+              <a:t>４　雨粒　</a:t>
+            </a:r>
+            <a:endParaRPr lang="en-US" altLang="ja-JP" dirty="0"/>
+          </a:p>
+          <a:p>
+            <a:pPr algn="ctr"/>
+            <a:r>
+              <a:rPr kumimoji="1" lang="ja-JP" altLang="en-US" dirty="0"/>
+              <a:t>５　雨粒</a:t>
+            </a:r>
+            <a:endParaRPr kumimoji="1" lang="en-US" altLang="ja-JP" dirty="0"/>
+          </a:p>
+          <a:p>
+            <a:pPr algn="ctr"/>
+            <a:r>
+              <a:rPr kumimoji="1" lang="ja-JP" altLang="en-US" dirty="0"/>
+              <a:t>　</a:t>
+            </a:r>
+          </a:p>
+        </p:txBody>
+      </p:sp>
+    </p:spTree>
+    <p:extLst>
+      <p:ext uri="{BB962C8B-B14F-4D97-AF65-F5344CB8AC3E}">
+        <p14:creationId xmlns:p14="http://schemas.microsoft.com/office/powerpoint/2010/main" val="595033509"/>
+      </p:ext>
+    </p:extLst>
+  </p:cSld>
+  <p:clrMapOvr>
+    <a:masterClrMapping/>
+  </p:clrMapOvr>
+</p:sld>
+</file>
+
+<file path=ppt/slides/slide8.xml><?xml version="1.0" encoding="utf-8"?>
 <p:sld xmlns:a="http://schemas.openxmlformats.org/drawingml/2006/main" xmlns:r="http://schemas.openxmlformats.org/officeDocument/2006/relationships" xmlns:p="http://schemas.openxmlformats.org/presentationml/2006/main">
   <p:cSld>
     <p:spTree>
